--- a/docs/poster/variants/v26.pptx
+++ b/docs/poster/variants/v26.pptx
@@ -4287,6 +4287,90 @@
               </a:spcAft>
             </a:pPr>
             <a:r>
+              <a:rPr sz="6200" b="1">
+                <a:solidFill>
+                  <a:srgbClr val="B5502A"/>
+                </a:solidFill>
+                <a:latin typeface="Georgia"/>
+              </a:rPr>
+              <a:t>1,389</a:t>
+            </a:r>
+          </a:p>
+        </p:txBody>
+      </p:sp>
+      <p:sp>
+        <p:nvSpPr>
+          <p:cNvPr id="31" name="TextBox 30"/>
+          <p:cNvSpPr txBox="1"/>
+          <p:nvPr/>
+        </p:nvSpPr>
+        <p:spPr>
+          <a:xfrm>
+            <a:off x="731520" y="16415004"/>
+            <a:ext cx="20482560" cy="365760"/>
+          </a:xfrm>
+          <a:prstGeom prst="rect">
+            <a:avLst/>
+          </a:prstGeom>
+          <a:noFill/>
+        </p:spPr>
+        <p:txBody>
+          <a:bodyPr wrap="square" lIns="0" rIns="0" tIns="0" bIns="0">
+            <a:spAutoFit/>
+          </a:bodyPr>
+          <a:lstStyle/>
+          <a:p>
+            <a:pPr algn="l">
+              <a:lnSpc>
+                <a:spcPct val="122000"/>
+              </a:lnSpc>
+              <a:spcAft>
+                <a:spcPts val="600"/>
+              </a:spcAft>
+            </a:pPr>
+            <a:r>
+              <a:rPr sz="1700" b="0">
+                <a:solidFill>
+                  <a:srgbClr val="66727E"/>
+                </a:solidFill>
+                <a:latin typeface="Arial"/>
+              </a:rPr>
+              <a:t>joystick commands through the platform</a:t>
+            </a:r>
+          </a:p>
+        </p:txBody>
+      </p:sp>
+      <p:sp>
+        <p:nvSpPr>
+          <p:cNvPr id="32" name="TextBox 31"/>
+          <p:cNvSpPr txBox="1"/>
+          <p:nvPr/>
+        </p:nvSpPr>
+        <p:spPr>
+          <a:xfrm>
+            <a:off x="731520" y="16900906"/>
+            <a:ext cx="20482560" cy="365760"/>
+          </a:xfrm>
+          <a:prstGeom prst="rect">
+            <a:avLst/>
+          </a:prstGeom>
+          <a:noFill/>
+        </p:spPr>
+        <p:txBody>
+          <a:bodyPr wrap="square" lIns="0" rIns="0" tIns="0" bIns="0">
+            <a:spAutoFit/>
+          </a:bodyPr>
+          <a:lstStyle/>
+          <a:p>
+            <a:pPr algn="l">
+              <a:lnSpc>
+                <a:spcPct val="95000"/>
+              </a:lnSpc>
+              <a:spcAft>
+                <a:spcPts val="0"/>
+              </a:spcAft>
+            </a:pPr>
+            <a:r>
               <a:rPr sz="3600" b="1">
                 <a:solidFill>
                   <a:srgbClr val="2F3A45"/>
@@ -4300,13 +4384,13 @@
       </p:sp>
       <p:sp>
         <p:nvSpPr>
-          <p:cNvPr id="31" name="Rectangle 30"/>
+          <p:cNvPr id="33" name="Rectangle 32"/>
           <p:cNvSpPr/>
           <p:nvPr/>
         </p:nvSpPr>
         <p:spPr>
           <a:xfrm>
-            <a:off x="731520" y="16206216"/>
+            <a:off x="731520" y="17495266"/>
             <a:ext cx="20482560" cy="27432"/>
           </a:xfrm>
           <a:prstGeom prst="rect">
@@ -4344,13 +4428,13 @@
       </p:sp>
       <p:sp>
         <p:nvSpPr>
-          <p:cNvPr id="32" name="TextBox 31"/>
+          <p:cNvPr id="34" name="TextBox 33"/>
           <p:cNvSpPr txBox="1"/>
           <p:nvPr/>
         </p:nvSpPr>
         <p:spPr>
           <a:xfrm>
-            <a:off x="731520" y="16535399"/>
+            <a:off x="731520" y="17824450"/>
             <a:ext cx="20482560" cy="365760"/>
           </a:xfrm>
           <a:prstGeom prst="rect">
@@ -4386,13 +4470,13 @@
       </p:sp>
       <p:sp>
         <p:nvSpPr>
-          <p:cNvPr id="33" name="TextBox 32"/>
+          <p:cNvPr id="35" name="TextBox 34"/>
           <p:cNvSpPr txBox="1"/>
           <p:nvPr/>
         </p:nvSpPr>
         <p:spPr>
           <a:xfrm>
-            <a:off x="731520" y="18302732"/>
+            <a:off x="731520" y="19591782"/>
             <a:ext cx="20482560" cy="365760"/>
           </a:xfrm>
           <a:prstGeom prst="rect">
@@ -4428,13 +4512,13 @@
       </p:sp>
       <p:sp>
         <p:nvSpPr>
-          <p:cNvPr id="34" name="Rectangle 33"/>
+          <p:cNvPr id="36" name="Rectangle 35"/>
           <p:cNvSpPr/>
           <p:nvPr/>
         </p:nvSpPr>
         <p:spPr>
           <a:xfrm>
-            <a:off x="731520" y="18897092"/>
+            <a:off x="731520" y="20186142"/>
             <a:ext cx="20482560" cy="27432"/>
           </a:xfrm>
           <a:prstGeom prst="rect">
@@ -4472,7 +4556,7 @@
       </p:sp>
       <p:pic>
         <p:nvPicPr>
-          <p:cNvPr id="35" name="Picture 34" descr="f_rounds.png"/>
+          <p:cNvPr id="37" name="Picture 36" descr="f_rounds.png"/>
           <p:cNvPicPr>
             <a:picLocks noChangeAspect="1"/>
           </p:cNvPicPr>
@@ -4486,7 +4570,7 @@
         </p:blipFill>
         <p:spPr>
           <a:xfrm>
-            <a:off x="731520" y="19226276"/>
+            <a:off x="731520" y="20515326"/>
             <a:ext cx="20482560" cy="4663440"/>
           </a:xfrm>
           <a:prstGeom prst="rect">
@@ -4496,13 +4580,13 @@
       </p:pic>
       <p:sp>
         <p:nvSpPr>
-          <p:cNvPr id="36" name="TextBox 35"/>
+          <p:cNvPr id="38" name="TextBox 37"/>
           <p:cNvSpPr txBox="1"/>
           <p:nvPr/>
         </p:nvSpPr>
         <p:spPr>
           <a:xfrm>
-            <a:off x="731520" y="23999443"/>
+            <a:off x="731520" y="25288493"/>
             <a:ext cx="20482560" cy="365760"/>
           </a:xfrm>
           <a:prstGeom prst="rect">
@@ -4538,13 +4622,13 @@
       </p:sp>
       <p:sp>
         <p:nvSpPr>
-          <p:cNvPr id="37" name="TextBox 36"/>
+          <p:cNvPr id="39" name="TextBox 38"/>
           <p:cNvSpPr txBox="1"/>
           <p:nvPr/>
         </p:nvSpPr>
         <p:spPr>
           <a:xfrm>
-            <a:off x="731520" y="25074625"/>
+            <a:off x="731520" y="26363675"/>
             <a:ext cx="20482560" cy="365760"/>
           </a:xfrm>
           <a:prstGeom prst="rect">
@@ -4580,7 +4664,7 @@
       </p:sp>
       <p:sp>
         <p:nvSpPr>
-          <p:cNvPr id="38" name="TextBox 37"/>
+          <p:cNvPr id="40" name="TextBox 39"/>
           <p:cNvSpPr txBox="1"/>
           <p:nvPr/>
         </p:nvSpPr>
@@ -4622,7 +4706,7 @@
       </p:sp>
       <p:sp>
         <p:nvSpPr>
-          <p:cNvPr id="39" name="Rectangle 38"/>
+          <p:cNvPr id="41" name="Rectangle 40"/>
           <p:cNvSpPr/>
           <p:nvPr/>
         </p:nvSpPr>
@@ -4666,7 +4750,7 @@
       </p:sp>
       <p:sp>
         <p:nvSpPr>
-          <p:cNvPr id="40" name="TextBox 39"/>
+          <p:cNvPr id="42" name="TextBox 41"/>
           <p:cNvSpPr txBox="1"/>
           <p:nvPr/>
         </p:nvSpPr>
@@ -4701,14 +4785,14 @@
                 </a:solidFill>
                 <a:latin typeface="Arial"/>
               </a:rPr>
-              <a:t>Robot 241 is a tracked rover that drives crop rows and streams camera, GPS and two IMUs. The laser cart carries the weeder: a galvanometer laser, a down camera over the work zone and a forward camera. A Unitree humanoid has a project and has uploaded nothing yet. Between them the two ground vehicles have recorded 2,686 frames in 26 drives.</a:t>
-            </a:r>
-          </a:p>
-        </p:txBody>
-      </p:sp>
-      <p:sp>
-        <p:nvSpPr>
-          <p:cNvPr id="41" name="TextBox 40"/>
+              <a:t>Robot 241 is a tracked rover that drives crop rows and streams camera, GPS and two IMUs. The laser cart carries the weeder: a galvanometer laser, a down camera over the work zone and a forward camera. Ten projects sit on the platform and two of them have a robot reporting into them. Between those two vehicles, 2,686 frames in 26 drives.</a:t>
+            </a:r>
+          </a:p>
+        </p:txBody>
+      </p:sp>
+      <p:sp>
+        <p:nvSpPr>
+          <p:cNvPr id="43" name="TextBox 42"/>
           <p:cNvSpPr txBox="1"/>
           <p:nvPr/>
         </p:nvSpPr>
@@ -4737,6 +4821,90 @@
               </a:spcAft>
             </a:pPr>
             <a:r>
+              <a:rPr sz="6200" b="1">
+                <a:solidFill>
+                  <a:srgbClr val="B5502A"/>
+                </a:solidFill>
+                <a:latin typeface="Georgia"/>
+              </a:rPr>
+              <a:t>14</a:t>
+            </a:r>
+          </a:p>
+        </p:txBody>
+      </p:sp>
+      <p:sp>
+        <p:nvSpPr>
+          <p:cNvPr id="44" name="TextBox 43"/>
+          <p:cNvSpPr txBox="1"/>
+          <p:nvPr/>
+        </p:nvSpPr>
+        <p:spPr>
+          <a:xfrm>
+            <a:off x="21579840" y="17096740"/>
+            <a:ext cx="10607040" cy="365760"/>
+          </a:xfrm>
+          <a:prstGeom prst="rect">
+            <a:avLst/>
+          </a:prstGeom>
+          <a:noFill/>
+        </p:spPr>
+        <p:txBody>
+          <a:bodyPr wrap="square" lIns="0" rIns="0" tIns="0" bIns="0">
+            <a:spAutoFit/>
+          </a:bodyPr>
+          <a:lstStyle/>
+          <a:p>
+            <a:pPr algn="l">
+              <a:lnSpc>
+                <a:spcPct val="122000"/>
+              </a:lnSpc>
+              <a:spcAft>
+                <a:spcPts val="600"/>
+              </a:spcAft>
+            </a:pPr>
+            <a:r>
+              <a:rPr sz="1700" b="0">
+                <a:solidFill>
+                  <a:srgbClr val="66727E"/>
+                </a:solidFill>
+                <a:latin typeface="Arial"/>
+              </a:rPr>
+              <a:t>analysis tools the planner can choose from</a:t>
+            </a:r>
+          </a:p>
+        </p:txBody>
+      </p:sp>
+      <p:sp>
+        <p:nvSpPr>
+          <p:cNvPr id="45" name="TextBox 44"/>
+          <p:cNvSpPr txBox="1"/>
+          <p:nvPr/>
+        </p:nvSpPr>
+        <p:spPr>
+          <a:xfrm>
+            <a:off x="21579840" y="17582642"/>
+            <a:ext cx="10607040" cy="365760"/>
+          </a:xfrm>
+          <a:prstGeom prst="rect">
+            <a:avLst/>
+          </a:prstGeom>
+          <a:noFill/>
+        </p:spPr>
+        <p:txBody>
+          <a:bodyPr wrap="square" lIns="0" rIns="0" tIns="0" bIns="0">
+            <a:spAutoFit/>
+          </a:bodyPr>
+          <a:lstStyle/>
+          <a:p>
+            <a:pPr algn="l">
+              <a:lnSpc>
+                <a:spcPct val="95000"/>
+              </a:lnSpc>
+              <a:spcAft>
+                <a:spcPts val="0"/>
+              </a:spcAft>
+            </a:pPr>
+            <a:r>
               <a:rPr sz="3600" b="1">
                 <a:solidFill>
                   <a:srgbClr val="2F3A45"/>
@@ -4750,13 +4918,13 @@
       </p:sp>
       <p:sp>
         <p:nvSpPr>
-          <p:cNvPr id="42" name="Rectangle 41"/>
+          <p:cNvPr id="46" name="Rectangle 45"/>
           <p:cNvSpPr/>
           <p:nvPr/>
         </p:nvSpPr>
         <p:spPr>
           <a:xfrm>
-            <a:off x="21579840" y="16887952"/>
+            <a:off x="21579840" y="18177001"/>
             <a:ext cx="10607040" cy="27432"/>
           </a:xfrm>
           <a:prstGeom prst="rect">
@@ -4794,13 +4962,13 @@
       </p:sp>
       <p:sp>
         <p:nvSpPr>
-          <p:cNvPr id="43" name="TextBox 42"/>
+          <p:cNvPr id="47" name="TextBox 46"/>
           <p:cNvSpPr txBox="1"/>
           <p:nvPr/>
         </p:nvSpPr>
         <p:spPr>
           <a:xfrm>
-            <a:off x="21579840" y="17217136"/>
+            <a:off x="21579840" y="18506185"/>
             <a:ext cx="10607040" cy="365760"/>
           </a:xfrm>
           <a:prstGeom prst="rect">
@@ -4836,13 +5004,13 @@
       </p:sp>
       <p:sp>
         <p:nvSpPr>
-          <p:cNvPr id="44" name="TextBox 43"/>
+          <p:cNvPr id="48" name="TextBox 47"/>
           <p:cNvSpPr txBox="1"/>
           <p:nvPr/>
         </p:nvSpPr>
         <p:spPr>
           <a:xfrm>
-            <a:off x="21579840" y="19325336"/>
+            <a:off x="21579840" y="20614386"/>
             <a:ext cx="10607040" cy="365760"/>
           </a:xfrm>
           <a:prstGeom prst="rect">
@@ -4878,13 +5046,13 @@
       </p:sp>
       <p:sp>
         <p:nvSpPr>
-          <p:cNvPr id="45" name="Rectangle 44"/>
+          <p:cNvPr id="49" name="Rectangle 48"/>
           <p:cNvSpPr/>
           <p:nvPr/>
         </p:nvSpPr>
         <p:spPr>
           <a:xfrm>
-            <a:off x="21579840" y="19919696"/>
+            <a:off x="21579840" y="21208745"/>
             <a:ext cx="10607040" cy="27432"/>
           </a:xfrm>
           <a:prstGeom prst="rect">
@@ -4922,13 +5090,13 @@
       </p:sp>
       <p:sp>
         <p:nvSpPr>
-          <p:cNvPr id="46" name="TextBox 45"/>
+          <p:cNvPr id="50" name="TextBox 49"/>
           <p:cNvSpPr txBox="1"/>
           <p:nvPr/>
         </p:nvSpPr>
         <p:spPr>
           <a:xfrm>
-            <a:off x="21579840" y="20248879"/>
+            <a:off x="21579840" y="21537929"/>
             <a:ext cx="10607040" cy="365760"/>
           </a:xfrm>
           <a:prstGeom prst="rect">
@@ -4964,13 +5132,13 @@
       </p:sp>
       <p:sp>
         <p:nvSpPr>
-          <p:cNvPr id="47" name="TextBox 46"/>
+          <p:cNvPr id="51" name="TextBox 50"/>
           <p:cNvSpPr txBox="1"/>
           <p:nvPr/>
         </p:nvSpPr>
         <p:spPr>
           <a:xfrm>
-            <a:off x="21579840" y="22016212"/>
+            <a:off x="21579840" y="23305262"/>
             <a:ext cx="10607040" cy="365760"/>
           </a:xfrm>
           <a:prstGeom prst="rect">
@@ -4993,6 +5161,90 @@
               </a:spcAft>
             </a:pPr>
             <a:r>
+              <a:rPr sz="6200" b="1">
+                <a:solidFill>
+                  <a:srgbClr val="B5502A"/>
+                </a:solidFill>
+                <a:latin typeface="Georgia"/>
+              </a:rPr>
+              <a:t>92</a:t>
+            </a:r>
+          </a:p>
+        </p:txBody>
+      </p:sp>
+      <p:sp>
+        <p:nvSpPr>
+          <p:cNvPr id="52" name="TextBox 51"/>
+          <p:cNvSpPr txBox="1"/>
+          <p:nvPr/>
+        </p:nvSpPr>
+        <p:spPr>
+          <a:xfrm>
+            <a:off x="21579840" y="24108410"/>
+            <a:ext cx="10607040" cy="365760"/>
+          </a:xfrm>
+          <a:prstGeom prst="rect">
+            <a:avLst/>
+          </a:prstGeom>
+          <a:noFill/>
+        </p:spPr>
+        <p:txBody>
+          <a:bodyPr wrap="square" lIns="0" rIns="0" tIns="0" bIns="0">
+            <a:spAutoFit/>
+          </a:bodyPr>
+          <a:lstStyle/>
+          <a:p>
+            <a:pPr algn="l">
+              <a:lnSpc>
+                <a:spcPct val="122000"/>
+              </a:lnSpc>
+              <a:spcAft>
+                <a:spcPts val="600"/>
+              </a:spcAft>
+            </a:pPr>
+            <a:r>
+              <a:rPr sz="1700" b="0">
+                <a:solidFill>
+                  <a:srgbClr val="66727E"/>
+                </a:solidFill>
+                <a:latin typeface="Arial"/>
+              </a:rPr>
+              <a:t>questions asked of a dataset so far</a:t>
+            </a:r>
+          </a:p>
+        </p:txBody>
+      </p:sp>
+      <p:sp>
+        <p:nvSpPr>
+          <p:cNvPr id="53" name="TextBox 52"/>
+          <p:cNvSpPr txBox="1"/>
+          <p:nvPr/>
+        </p:nvSpPr>
+        <p:spPr>
+          <a:xfrm>
+            <a:off x="21579840" y="24594312"/>
+            <a:ext cx="10607040" cy="365760"/>
+          </a:xfrm>
+          <a:prstGeom prst="rect">
+            <a:avLst/>
+          </a:prstGeom>
+          <a:noFill/>
+        </p:spPr>
+        <p:txBody>
+          <a:bodyPr wrap="square" lIns="0" rIns="0" tIns="0" bIns="0">
+            <a:spAutoFit/>
+          </a:bodyPr>
+          <a:lstStyle/>
+          <a:p>
+            <a:pPr algn="l">
+              <a:lnSpc>
+                <a:spcPct val="95000"/>
+              </a:lnSpc>
+              <a:spcAft>
+                <a:spcPts val="0"/>
+              </a:spcAft>
+            </a:pPr>
+            <a:r>
               <a:rPr sz="3600" b="1">
                 <a:solidFill>
                   <a:srgbClr val="2F3A45"/>
@@ -5006,13 +5258,13 @@
       </p:sp>
       <p:sp>
         <p:nvSpPr>
-          <p:cNvPr id="48" name="Rectangle 47"/>
+          <p:cNvPr id="54" name="Rectangle 53"/>
           <p:cNvSpPr/>
           <p:nvPr/>
         </p:nvSpPr>
         <p:spPr>
           <a:xfrm>
-            <a:off x="21579840" y="22610572"/>
+            <a:off x="21579840" y="25188671"/>
             <a:ext cx="10607040" cy="27432"/>
           </a:xfrm>
           <a:prstGeom prst="rect">
@@ -5050,13 +5302,13 @@
       </p:sp>
       <p:sp>
         <p:nvSpPr>
-          <p:cNvPr id="49" name="TextBox 48"/>
+          <p:cNvPr id="55" name="TextBox 54"/>
           <p:cNvSpPr txBox="1"/>
           <p:nvPr/>
         </p:nvSpPr>
         <p:spPr>
           <a:xfrm>
-            <a:off x="21579840" y="22939755"/>
+            <a:off x="21579840" y="25517855"/>
             <a:ext cx="10607040" cy="365760"/>
           </a:xfrm>
           <a:prstGeom prst="rect">
@@ -5092,13 +5344,13 @@
       </p:sp>
       <p:sp>
         <p:nvSpPr>
-          <p:cNvPr id="50" name="TextBox 49"/>
+          <p:cNvPr id="56" name="TextBox 55"/>
           <p:cNvSpPr txBox="1"/>
           <p:nvPr/>
         </p:nvSpPr>
         <p:spPr>
           <a:xfrm>
-            <a:off x="21579840" y="25388824"/>
+            <a:off x="32552640" y="12920980"/>
             <a:ext cx="10607040" cy="365760"/>
           </a:xfrm>
           <a:prstGeom prst="rect">
@@ -5127,20 +5379,20 @@
                 </a:solidFill>
                 <a:latin typeface="Georgia"/>
               </a:rPr>
-              <a:t>More web data, less accuracy</a:t>
-            </a:r>
-          </a:p>
-        </p:txBody>
-      </p:sp>
-      <p:sp>
-        <p:nvSpPr>
-          <p:cNvPr id="51" name="Rectangle 50"/>
+              <a:t>A drive becomes a dataset as it opens</a:t>
+            </a:r>
+          </a:p>
+        </p:txBody>
+      </p:sp>
+      <p:sp>
+        <p:nvSpPr>
+          <p:cNvPr id="57" name="Rectangle 56"/>
           <p:cNvSpPr/>
           <p:nvPr/>
         </p:nvSpPr>
         <p:spPr>
           <a:xfrm>
-            <a:off x="21579840" y="25983183"/>
+            <a:off x="32552640" y="13515340"/>
             <a:ext cx="10607040" cy="27432"/>
           </a:xfrm>
           <a:prstGeom prst="rect">
@@ -5178,13 +5430,13 @@
       </p:sp>
       <p:sp>
         <p:nvSpPr>
-          <p:cNvPr id="52" name="TextBox 51"/>
+          <p:cNvPr id="58" name="TextBox 57"/>
           <p:cNvSpPr txBox="1"/>
           <p:nvPr/>
         </p:nvSpPr>
         <p:spPr>
           <a:xfrm>
-            <a:off x="21579840" y="26312367"/>
+            <a:off x="32552640" y="13844523"/>
             <a:ext cx="10607040" cy="365760"/>
           </a:xfrm>
           <a:prstGeom prst="rect">
@@ -5213,20 +5465,20 @@
                 </a:solidFill>
                 <a:latin typeface="Arial"/>
               </a:rPr>
-              <a:t>Twelve times the training data costs 0.0189 on our own 1,977-image holdout, three seeds at every rung, which is 8.2 times the seed spread. The same eight checkpoints fall on a second weed dataset too. One of six audited web sources reaches a 0.90 label-precision bar.</a:t>
-            </a:r>
-          </a:p>
-        </p:txBody>
-      </p:sp>
-      <p:sp>
-        <p:nvSpPr>
-          <p:cNvPr id="53" name="TextBox 52"/>
+              <a:t>A vehicle opens a session and the platform registers it as a governed dataset at that moment, not after the drive ends. Frames and sensor batches arrive over one API key. Robot 241 sends camera, GPS and two IMUs; the laser cart sends camera, laser state, vehicle telemetry and its own detections, and no position at all.</a:t>
+            </a:r>
+          </a:p>
+        </p:txBody>
+      </p:sp>
+      <p:sp>
+        <p:nvSpPr>
+          <p:cNvPr id="59" name="TextBox 58"/>
           <p:cNvSpPr txBox="1"/>
           <p:nvPr/>
         </p:nvSpPr>
         <p:spPr>
           <a:xfrm>
-            <a:off x="32552640" y="12920980"/>
+            <a:off x="32552640" y="16293592"/>
             <a:ext cx="10607040" cy="365760"/>
           </a:xfrm>
           <a:prstGeom prst="rect">
@@ -5255,20 +5507,20 @@
                 </a:solidFill>
                 <a:latin typeface="Georgia"/>
               </a:rPr>
-              <a:t>A drive becomes a dataset as it opens</a:t>
-            </a:r>
-          </a:p>
-        </p:txBody>
-      </p:sp>
-      <p:sp>
-        <p:nvSpPr>
-          <p:cNvPr id="54" name="Rectangle 53"/>
+              <a:t>Four frames, as recorded</a:t>
+            </a:r>
+          </a:p>
+        </p:txBody>
+      </p:sp>
+      <p:sp>
+        <p:nvSpPr>
+          <p:cNvPr id="60" name="Rectangle 59"/>
           <p:cNvSpPr/>
           <p:nvPr/>
         </p:nvSpPr>
         <p:spPr>
           <a:xfrm>
-            <a:off x="32552640" y="13515340"/>
+            <a:off x="32552640" y="16887952"/>
             <a:ext cx="10607040" cy="27432"/>
           </a:xfrm>
           <a:prstGeom prst="rect">
@@ -5304,15 +5556,81 @@
           </a:p>
         </p:txBody>
       </p:sp>
-      <p:sp>
-        <p:nvSpPr>
-          <p:cNvPr id="55" name="TextBox 54"/>
+      <p:pic>
+        <p:nvPicPr>
+          <p:cNvPr id="61" name="Picture 60" descr="l_robots.png"/>
+          <p:cNvPicPr>
+            <a:picLocks noChangeAspect="1"/>
+          </p:cNvPicPr>
+          <p:nvPr/>
+        </p:nvPicPr>
+        <p:blipFill>
+          <a:blip r:embed="rId4"/>
+          <a:stretch>
+            <a:fillRect/>
+          </a:stretch>
+        </p:blipFill>
+        <p:spPr>
+          <a:xfrm>
+            <a:off x="32552640" y="17217136"/>
+            <a:ext cx="10607040" cy="2377440"/>
+          </a:xfrm>
+          <a:prstGeom prst="rect">
+            <a:avLst/>
+          </a:prstGeom>
+        </p:spPr>
+      </p:pic>
+      <p:sp>
+        <p:nvSpPr>
+          <p:cNvPr id="62" name="TextBox 61"/>
           <p:cNvSpPr txBox="1"/>
           <p:nvPr/>
         </p:nvSpPr>
         <p:spPr>
           <a:xfrm>
-            <a:off x="32552640" y="13844523"/>
+            <a:off x="32552640" y="19704304"/>
+            <a:ext cx="10607040" cy="365760"/>
+          </a:xfrm>
+          <a:prstGeom prst="rect">
+            <a:avLst/>
+          </a:prstGeom>
+          <a:noFill/>
+        </p:spPr>
+        <p:txBody>
+          <a:bodyPr wrap="square" lIns="0" rIns="0" tIns="0" bIns="0">
+            <a:spAutoFit/>
+          </a:bodyPr>
+          <a:lstStyle/>
+          <a:p>
+            <a:pPr algn="l">
+              <a:lnSpc>
+                <a:spcPct val="118000"/>
+              </a:lnSpc>
+              <a:spcAft>
+                <a:spcPts val="0"/>
+              </a:spcAft>
+            </a:pPr>
+            <a:r>
+              <a:rPr sz="1700" b="0">
+                <a:solidFill>
+                  <a:srgbClr val="66727E"/>
+                </a:solidFill>
+                <a:latin typeface="Arial"/>
+              </a:rPr>
+              <a:t>Figure 4.  Frames as recorded, unenhanced. Robot 241 has sent 2,238 frames at 640 x 360 and 1 Hz, the laser cart 427, and 75 of the cart's were taken in a field. None of the 2,686 is labelled. The rectangle in the down camera is the cart's fixed work-zone overlay. It is drawn on every frame, including the ones with no vegetation in them.</a:t>
+            </a:r>
+          </a:p>
+        </p:txBody>
+      </p:sp>
+      <p:sp>
+        <p:nvSpPr>
+          <p:cNvPr id="63" name="TextBox 62"/>
+          <p:cNvSpPr txBox="1"/>
+          <p:nvPr/>
+        </p:nvSpPr>
+        <p:spPr>
+          <a:xfrm>
+            <a:off x="32552640" y="21034248"/>
             <a:ext cx="10607040" cy="365760"/>
           </a:xfrm>
           <a:prstGeom prst="rect">
@@ -5341,20 +5659,20 @@
                 </a:solidFill>
                 <a:latin typeface="Arial"/>
               </a:rPr>
-              <a:t>A vehicle opens a session and the platform registers it as a governed dataset at that moment, not after the drive ends. Frames and sensor batches arrive over one API key. Robot 241 sends camera, GPS and two IMUs; the laser cart sends camera, laser state, vehicle telemetry and its own detections, and no position at all.</a:t>
-            </a:r>
-          </a:p>
-        </p:txBody>
-      </p:sp>
-      <p:sp>
-        <p:nvSpPr>
-          <p:cNvPr id="56" name="TextBox 55"/>
+              <a:t>Nothing here is enhanced and nothing is labelled. The rectangle in the cart's down camera is a fixed work-zone overlay: it sits at the same pixels on frames with no vegetation in them at all.</a:t>
+            </a:r>
+          </a:p>
+        </p:txBody>
+      </p:sp>
+      <p:sp>
+        <p:nvSpPr>
+          <p:cNvPr id="64" name="TextBox 63"/>
           <p:cNvSpPr txBox="1"/>
           <p:nvPr/>
         </p:nvSpPr>
         <p:spPr>
           <a:xfrm>
-            <a:off x="32552640" y="16293592"/>
+            <a:off x="32552640" y="22801580"/>
             <a:ext cx="10607040" cy="365760"/>
           </a:xfrm>
           <a:prstGeom prst="rect">
@@ -5383,20 +5701,20 @@
                 </a:solidFill>
                 <a:latin typeface="Georgia"/>
               </a:rPr>
-              <a:t>Four frames, as recorded</a:t>
-            </a:r>
-          </a:p>
-        </p:txBody>
-      </p:sp>
-      <p:sp>
-        <p:nvSpPr>
-          <p:cNvPr id="57" name="Rectangle 56"/>
+              <a:t>Only one robot has the button</a:t>
+            </a:r>
+          </a:p>
+        </p:txBody>
+      </p:sp>
+      <p:sp>
+        <p:nvSpPr>
+          <p:cNvPr id="65" name="Rectangle 64"/>
           <p:cNvSpPr/>
           <p:nvPr/>
         </p:nvSpPr>
         <p:spPr>
           <a:xfrm>
-            <a:off x="32552640" y="16887952"/>
+            <a:off x="32552640" y="23395940"/>
             <a:ext cx="10607040" cy="27432"/>
           </a:xfrm>
           <a:prstGeom prst="rect">
@@ -5432,81 +5750,15 @@
           </a:p>
         </p:txBody>
       </p:sp>
-      <p:pic>
-        <p:nvPicPr>
-          <p:cNvPr id="58" name="Picture 57" descr="l_robots.png"/>
-          <p:cNvPicPr>
-            <a:picLocks noChangeAspect="1"/>
-          </p:cNvPicPr>
-          <p:nvPr/>
-        </p:nvPicPr>
-        <p:blipFill>
-          <a:blip r:embed="rId4"/>
-          <a:stretch>
-            <a:fillRect/>
-          </a:stretch>
-        </p:blipFill>
-        <p:spPr>
-          <a:xfrm>
-            <a:off x="32552640" y="17217136"/>
-            <a:ext cx="10607040" cy="2377440"/>
-          </a:xfrm>
-          <a:prstGeom prst="rect">
-            <a:avLst/>
-          </a:prstGeom>
-        </p:spPr>
-      </p:pic>
-      <p:sp>
-        <p:nvSpPr>
-          <p:cNvPr id="59" name="TextBox 58"/>
+      <p:sp>
+        <p:nvSpPr>
+          <p:cNvPr id="66" name="TextBox 65"/>
           <p:cNvSpPr txBox="1"/>
           <p:nvPr/>
         </p:nvSpPr>
         <p:spPr>
           <a:xfrm>
-            <a:off x="32552640" y="19704304"/>
-            <a:ext cx="10607040" cy="365760"/>
-          </a:xfrm>
-          <a:prstGeom prst="rect">
-            <a:avLst/>
-          </a:prstGeom>
-          <a:noFill/>
-        </p:spPr>
-        <p:txBody>
-          <a:bodyPr wrap="square" lIns="0" rIns="0" tIns="0" bIns="0">
-            <a:spAutoFit/>
-          </a:bodyPr>
-          <a:lstStyle/>
-          <a:p>
-            <a:pPr algn="l">
-              <a:lnSpc>
-                <a:spcPct val="118000"/>
-              </a:lnSpc>
-              <a:spcAft>
-                <a:spcPts val="0"/>
-              </a:spcAft>
-            </a:pPr>
-            <a:r>
-              <a:rPr sz="1700" b="0">
-                <a:solidFill>
-                  <a:srgbClr val="66727E"/>
-                </a:solidFill>
-                <a:latin typeface="Arial"/>
-              </a:rPr>
-              <a:t>Figure 4.  Frames as recorded, unenhanced. Robot 241 has sent 2,238 frames at 640 x 360 and 1 Hz, the laser cart 427, and 75 of the cart's were taken in a field. None of the 2,686 is labelled. The rectangle in the down camera is the cart's fixed work-zone overlay. It is drawn on every frame, including the ones with no vegetation in them.</a:t>
-            </a:r>
-          </a:p>
-        </p:txBody>
-      </p:sp>
-      <p:sp>
-        <p:nvSpPr>
-          <p:cNvPr id="60" name="TextBox 59"/>
-          <p:cNvSpPr txBox="1"/>
-          <p:nvPr/>
-        </p:nvSpPr>
-        <p:spPr>
-          <a:xfrm>
-            <a:off x="32552640" y="21034248"/>
+            <a:off x="32552640" y="23725124"/>
             <a:ext cx="10607040" cy="365760"/>
           </a:xfrm>
           <a:prstGeom prst="rect">
@@ -5535,20 +5787,20 @@
                 </a:solidFill>
                 <a:latin typeface="Arial"/>
               </a:rPr>
-              <a:t>Nothing here is enhanced and nothing is labelled. The rectangle in the cart's down camera is a fixed work-zone overlay: it sits at the same pixels on frames with no vegetation in them at all.</a:t>
-            </a:r>
-          </a:p>
-        </p:txBody>
-      </p:sp>
-      <p:sp>
-        <p:nvSpPr>
-          <p:cNvPr id="61" name="TextBox 60"/>
+              <a:t>The Drive button appears on the 241 project and not on the laser cart's, because the allow-list holds one target. The rover has been dark since 2026-08-28: the platform answers a drive request today with its own offline page. The cart has never been drivable from the platform.</a:t>
+            </a:r>
+          </a:p>
+        </p:txBody>
+      </p:sp>
+      <p:sp>
+        <p:nvSpPr>
+          <p:cNvPr id="67" name="TextBox 66"/>
           <p:cNvSpPr txBox="1"/>
           <p:nvPr/>
         </p:nvSpPr>
         <p:spPr>
           <a:xfrm>
-            <a:off x="32552640" y="22801580"/>
+            <a:off x="32552640" y="25833324"/>
             <a:ext cx="10607040" cy="365760"/>
           </a:xfrm>
           <a:prstGeom prst="rect">
@@ -5577,20 +5829,20 @@
                 </a:solidFill>
                 <a:latin typeface="Georgia"/>
               </a:rPr>
-              <a:t>Only one robot has the button</a:t>
-            </a:r>
-          </a:p>
-        </p:txBody>
-      </p:sp>
-      <p:sp>
-        <p:nvSpPr>
-          <p:cNvPr id="62" name="Rectangle 61"/>
+              <a:t>Which decisions a model makes</a:t>
+            </a:r>
+          </a:p>
+        </p:txBody>
+      </p:sp>
+      <p:sp>
+        <p:nvSpPr>
+          <p:cNvPr id="68" name="Rectangle 67"/>
           <p:cNvSpPr/>
           <p:nvPr/>
         </p:nvSpPr>
         <p:spPr>
           <a:xfrm>
-            <a:off x="32552640" y="23395940"/>
+            <a:off x="32552640" y="26427684"/>
             <a:ext cx="10607040" cy="27432"/>
           </a:xfrm>
           <a:prstGeom prst="rect">
@@ -5628,13 +5880,13 @@
       </p:sp>
       <p:sp>
         <p:nvSpPr>
-          <p:cNvPr id="63" name="TextBox 62"/>
+          <p:cNvPr id="69" name="TextBox 68"/>
           <p:cNvSpPr txBox="1"/>
           <p:nvPr/>
         </p:nvSpPr>
         <p:spPr>
           <a:xfrm>
-            <a:off x="32552640" y="23725124"/>
+            <a:off x="32552640" y="26756868"/>
             <a:ext cx="10607040" cy="365760"/>
           </a:xfrm>
           <a:prstGeom prst="rect">
@@ -5663,69 +5915,27 @@
                 </a:solidFill>
                 <a:latin typeface="Arial"/>
               </a:rPr>
-              <a:t>The Drive button appears on the 241 project and not on the laser cart's, because the allow-list holds one target. The rover has been dark since 2026-08-28: the platform answers a drive request today with its own offline page. The cart has never been drivable from the platform.</a:t>
-            </a:r>
-          </a:p>
-        </p:txBody>
-      </p:sp>
-      <p:sp>
-        <p:nvSpPr>
-          <p:cNvPr id="64" name="TextBox 63"/>
-          <p:cNvSpPr txBox="1"/>
-          <p:nvPr/>
-        </p:nvSpPr>
-        <p:spPr>
-          <a:xfrm>
-            <a:off x="32552640" y="25833324"/>
-            <a:ext cx="10607040" cy="365760"/>
-          </a:xfrm>
-          <a:prstGeom prst="rect">
-            <a:avLst/>
-          </a:prstGeom>
-          <a:noFill/>
-        </p:spPr>
-        <p:txBody>
-          <a:bodyPr wrap="square" lIns="0" rIns="0" tIns="0" bIns="0">
-            <a:spAutoFit/>
-          </a:bodyPr>
-          <a:lstStyle/>
-          <a:p>
-            <a:pPr algn="l">
-              <a:lnSpc>
-                <a:spcPct val="95000"/>
-              </a:lnSpc>
-              <a:spcAft>
-                <a:spcPts val="0"/>
-              </a:spcAft>
-            </a:pPr>
-            <a:r>
-              <a:rPr sz="3600" b="1">
-                <a:solidFill>
-                  <a:srgbClr val="2F3A45"/>
-                </a:solidFill>
-                <a:latin typeface="Georgia"/>
-              </a:rPr>
-              <a:t>Which decisions a model makes</a:t>
-            </a:r>
-          </a:p>
-        </p:txBody>
-      </p:sp>
-      <p:sp>
-        <p:nvSpPr>
-          <p:cNvPr id="65" name="Rectangle 64"/>
+              <a:t>A language model decides what the collector goes after next, judges whether a candidate dataset is on topic, and reviews a finished step. Those run on the cluster, as batch jobs, on open weights. The lab box hosts only the small guide model, and a verdict produced there is marked in its own record as a draft that may not be reported.</a:t>
+            </a:r>
+          </a:p>
+        </p:txBody>
+      </p:sp>
+      <p:sp>
+        <p:nvSpPr>
+          <p:cNvPr id="70" name="Rectangle 69"/>
           <p:cNvSpPr/>
           <p:nvPr/>
         </p:nvSpPr>
         <p:spPr>
           <a:xfrm>
-            <a:off x="32552640" y="26427684"/>
-            <a:ext cx="10607040" cy="27432"/>
+            <a:off x="731520" y="30632400"/>
+            <a:ext cx="42428160" cy="20116"/>
           </a:xfrm>
           <a:prstGeom prst="rect">
             <a:avLst/>
           </a:prstGeom>
           <a:solidFill>
-            <a:srgbClr val="B5502A"/>
+            <a:srgbClr val="CAD2DA"/>
           </a:solidFill>
           <a:ln>
             <a:noFill/>
@@ -5756,93 +5966,7 @@
       </p:sp>
       <p:sp>
         <p:nvSpPr>
-          <p:cNvPr id="66" name="TextBox 65"/>
-          <p:cNvSpPr txBox="1"/>
-          <p:nvPr/>
-        </p:nvSpPr>
-        <p:spPr>
-          <a:xfrm>
-            <a:off x="32552640" y="26756868"/>
-            <a:ext cx="10607040" cy="365760"/>
-          </a:xfrm>
-          <a:prstGeom prst="rect">
-            <a:avLst/>
-          </a:prstGeom>
-          <a:noFill/>
-        </p:spPr>
-        <p:txBody>
-          <a:bodyPr wrap="square" lIns="0" rIns="0" tIns="0" bIns="0">
-            <a:spAutoFit/>
-          </a:bodyPr>
-          <a:lstStyle/>
-          <a:p>
-            <a:pPr algn="l">
-              <a:lnSpc>
-                <a:spcPct val="122000"/>
-              </a:lnSpc>
-              <a:spcAft>
-                <a:spcPts val="1400"/>
-              </a:spcAft>
-            </a:pPr>
-            <a:r>
-              <a:rPr sz="2200" b="0">
-                <a:solidFill>
-                  <a:srgbClr val="24303B"/>
-                </a:solidFill>
-                <a:latin typeface="Arial"/>
-              </a:rPr>
-              <a:t>A language model decides what the collector goes after next, judges whether a candidate dataset is on topic, and reviews a finished step. Those run on the cluster, as batch jobs, on open weights. The lab box hosts only the small guide model, and a verdict produced there is marked in its own record as a draft that may not be reported.</a:t>
-            </a:r>
-          </a:p>
-        </p:txBody>
-      </p:sp>
-      <p:sp>
-        <p:nvSpPr>
-          <p:cNvPr id="67" name="Rectangle 66"/>
-          <p:cNvSpPr/>
-          <p:nvPr/>
-        </p:nvSpPr>
-        <p:spPr>
-          <a:xfrm>
-            <a:off x="731520" y="30632400"/>
-            <a:ext cx="42428160" cy="20116"/>
-          </a:xfrm>
-          <a:prstGeom prst="rect">
-            <a:avLst/>
-          </a:prstGeom>
-          <a:solidFill>
-            <a:srgbClr val="CAD2DA"/>
-          </a:solidFill>
-          <a:ln>
-            <a:noFill/>
-          </a:ln>
-          <a:effectLst/>
-        </p:spPr>
-        <p:style>
-          <a:lnRef idx="1">
-            <a:schemeClr val="accent1"/>
-          </a:lnRef>
-          <a:fillRef idx="3">
-            <a:schemeClr val="accent1"/>
-          </a:fillRef>
-          <a:effectRef idx="2">
-            <a:schemeClr val="accent1"/>
-          </a:effectRef>
-          <a:fontRef idx="minor">
-            <a:schemeClr val="lt1"/>
-          </a:fontRef>
-        </p:style>
-        <p:txBody>
-          <a:bodyPr rtlCol="0" anchor="ctr"/>
-          <a:lstStyle/>
-          <a:p>
-            <a:pPr algn="ctr"/>
-          </a:p>
-        </p:txBody>
-      </p:sp>
-      <p:sp>
-        <p:nvSpPr>
-          <p:cNvPr id="68" name="TextBox 67"/>
+          <p:cNvPr id="71" name="TextBox 70"/>
           <p:cNvSpPr txBox="1"/>
           <p:nvPr/>
         </p:nvSpPr>
@@ -5884,7 +6008,7 @@
       </p:sp>
       <p:sp>
         <p:nvSpPr>
-          <p:cNvPr id="69" name="TextBox 68"/>
+          <p:cNvPr id="72" name="TextBox 71"/>
           <p:cNvSpPr txBox="1"/>
           <p:nvPr/>
         </p:nvSpPr>
@@ -5926,7 +6050,7 @@
       </p:sp>
       <p:sp>
         <p:nvSpPr>
-          <p:cNvPr id="70" name="TextBox 69"/>
+          <p:cNvPr id="73" name="TextBox 72"/>
           <p:cNvSpPr txBox="1"/>
           <p:nvPr/>
         </p:nvSpPr>
